--- a/Schools_ML_Track/camp_2026/slides/DA/DA04.pptx
+++ b/Schools_ML_Track/camp_2026/slides/DA/DA04.pptx
@@ -128,7 +128,7 @@
   <p:extLst>
     <p:ext uri="{521415D9-36F7-43E2-AB2F-B90AF26B5E84}">
       <p14:sectionLst xmlns:p14="http://schemas.microsoft.com/office/powerpoint/2010/main">
-        <p14:section name="Opening" id="{b5b3a681-9320-dd77-b1e1-5a9cc628a8f0}">
+        <p14:section name="Opening" id="{b8428c8d-7e18-59f7-faec-1933824d2418}">
           <p14:sldIdLst>
             <p14:sldId id="256"/>
             <p14:sldId id="257"/>
@@ -139,7 +139,7 @@
             <p14:sldId id="262"/>
           </p14:sldIdLst>
         </p14:section>
-        <p14:section name="Block A" id="{791329a6-7eb1-6340-caf9-1f6cde4f6883}">
+        <p14:section name="Block A" id="{e3a5533a-8060-d107-1887-a468b3932ccd}">
           <p14:sldIdLst>
             <p14:sldId id="263"/>
             <p14:sldId id="264"/>
@@ -149,15 +149,15 @@
             <p14:sldId id="269"/>
           </p14:sldIdLst>
         </p14:section>
-        <p14:section name="Break" id="{2d35eb59-69eb-d8af-5289-c6c36ad0828b}">
+        <p14:section name="Break" id="{ad9a724c-5215-48d9-55c7-b74cefefc1ba}">
           <p14:sldIdLst>
             <p14:sldId id="267"/>
           </p14:sldIdLst>
         </p14:section>
-        <p14:section name="Block A" id="{e5e60775-9a1c-54d7-b187-33d3a56987da}">
+        <p14:section name="Block A" id="{a5c22d11-28af-dffe-0e66-9859440a2f51}">
           <p14:sldIdLst/>
         </p14:section>
-        <p14:section name="Block B" id="{e85ec7b1-799a-d9da-0422-9db2b8320135}">
+        <p14:section name="Block B" id="{7678056b-64ba-c1a3-d146-78d847b1e471}">
           <p14:sldIdLst>
             <p14:sldId id="270"/>
             <p14:sldId id="271"/>
@@ -166,7 +166,7 @@
             <p14:sldId id="274"/>
           </p14:sldIdLst>
         </p14:section>
-        <p14:section name="Make and close" id="{0f17ed2a-26c2-7a79-300b-6ae9399014d2}">
+        <p14:section name="Make and close" id="{26708b40-4cc1-3ab2-8056-c346622077eb}">
           <p14:sldIdLst>
             <p14:sldId id="275"/>
             <p14:sldId id="276"/>

--- a/Schools_ML_Track/camp_2026/slides/DA/DA04.pptx
+++ b/Schools_ML_Track/camp_2026/slides/DA/DA04.pptx
@@ -128,7 +128,7 @@
   <p:extLst>
     <p:ext uri="{521415D9-36F7-43E2-AB2F-B90AF26B5E84}">
       <p14:sectionLst xmlns:p14="http://schemas.microsoft.com/office/powerpoint/2010/main">
-        <p14:section name="Opening" id="{b8428c8d-7e18-59f7-faec-1933824d2418}">
+        <p14:section name="Opening" id="{44b29b48-c9c9-5109-0eb7-4bff875a2a5d}">
           <p14:sldIdLst>
             <p14:sldId id="256"/>
             <p14:sldId id="257"/>
@@ -139,7 +139,7 @@
             <p14:sldId id="262"/>
           </p14:sldIdLst>
         </p14:section>
-        <p14:section name="Block A" id="{e3a5533a-8060-d107-1887-a468b3932ccd}">
+        <p14:section name="Block A" id="{5cc41065-e166-c8b9-2ff6-06cc2a80470f}">
           <p14:sldIdLst>
             <p14:sldId id="263"/>
             <p14:sldId id="264"/>
@@ -149,15 +149,15 @@
             <p14:sldId id="269"/>
           </p14:sldIdLst>
         </p14:section>
-        <p14:section name="Break" id="{ad9a724c-5215-48d9-55c7-b74cefefc1ba}">
+        <p14:section name="Break" id="{56227d0f-bdd9-7635-b303-3573cf44467a}">
           <p14:sldIdLst>
             <p14:sldId id="267"/>
           </p14:sldIdLst>
         </p14:section>
-        <p14:section name="Block A" id="{a5c22d11-28af-dffe-0e66-9859440a2f51}">
+        <p14:section name="Block A" id="{46bc8a03-6305-9cb2-f5fa-483c457c5127}">
           <p14:sldIdLst/>
         </p14:section>
-        <p14:section name="Block B" id="{7678056b-64ba-c1a3-d146-78d847b1e471}">
+        <p14:section name="Block B" id="{3aab5fa9-e1b7-17ec-c8bd-e2d5f613fa2a}">
           <p14:sldIdLst>
             <p14:sldId id="270"/>
             <p14:sldId id="271"/>
@@ -166,7 +166,7 @@
             <p14:sldId id="274"/>
           </p14:sldIdLst>
         </p14:section>
-        <p14:section name="Make and close" id="{26708b40-4cc1-3ab2-8056-c346622077eb}">
+        <p14:section name="Make and close" id="{30ce3d4c-83a7-1f89-e36f-94cd4be5d87d}">
           <p14:sldIdLst>
             <p14:sldId id="275"/>
             <p14:sldId id="276"/>
@@ -6234,545 +6234,30 @@
           </a:p>
         </p:txBody>
       </p:sp>
-      <p:sp>
-        <p:nvSpPr>
-          <p:cNvPr id="4" name="Shape 2"/>
-          <p:cNvSpPr/>
+      <p:pic>
+        <p:nvPicPr>
+          <p:cNvPr id="4" name="Image 0" descr="Change one thing">    </p:cNvPr>
+          <p:cNvPicPr>
+            <a:picLocks noChangeAspect="1"/>
+          </p:cNvPicPr>
           <p:nvPr/>
-        </p:nvSpPr>
-        <p:spPr>
-          <a:xfrm>
-            <a:off x="7223760" y="1737360"/>
-            <a:ext cx="4297680" cy="3212592"/>
-          </a:xfrm>
-          <a:prstGeom prst="roundRect">
-            <a:avLst>
-              <a:gd name="adj" fmla="val 2277"/>
-            </a:avLst>
-          </a:prstGeom>
-          <a:solidFill>
-            <a:srgbClr val="111111"/>
-          </a:solidFill>
-          <a:ln/>
-        </p:spPr>
-      </p:sp>
-      <p:sp>
-        <p:nvSpPr>
-          <p:cNvPr id="5" name="Text 3"/>
-          <p:cNvSpPr txBox="1"/>
-          <p:nvPr/>
-        </p:nvSpPr>
-        <p:spPr>
-          <a:xfrm>
-            <a:off x="7424928" y="1938528"/>
-            <a:ext cx="3895344" cy="2810256"/>
-          </a:xfrm>
-          <a:prstGeom prst="rect">
-            <a:avLst/>
-          </a:prstGeom>
-          <a:noFill/>
-          <a:ln/>
-        </p:spPr>
-        <p:txBody>
-          <a:bodyPr wrap="square" lIns="0" tIns="0" rIns="0" bIns="0" rtlCol="0" anchor="t"/>
-          <a:lstStyle/>
-          <a:p>
-            <a:pPr algn="l" indent="0" marL="0">
-              <a:lnSpc>
-                <a:spcPts val="1820"/>
-              </a:lnSpc>
-              <a:buNone/>
-            </a:pPr>
-            <a:r>
-              <a:rPr lang="en-US" sz="1400" dirty="0">
-                <a:solidFill>
-                  <a:srgbClr val="FFFFFF"/>
-                </a:solidFill>
-                <a:latin typeface="Courier New" pitchFamily="34" charset="0"/>
-                <a:ea typeface="Courier New" pitchFamily="34" charset="-122"/>
-                <a:cs typeface="Courier New" pitchFamily="34" charset="-120"/>
-              </a:rPr>
-              <a:t>units = 6</a:t>
-            </a:r>
-            <a:endParaRPr lang="en-US" sz="1400" dirty="0"/>
-          </a:p>
-          <a:p>
-            <a:pPr algn="l" indent="0" marL="0">
-              <a:lnSpc>
-                <a:spcPts val="1820"/>
-              </a:lnSpc>
-              <a:buNone/>
-            </a:pPr>
-            <a:r>
-              <a:rPr lang="en-US" sz="1400" dirty="0">
-                <a:solidFill>
-                  <a:srgbClr val="FFFFFF"/>
-                </a:solidFill>
-                <a:latin typeface="Courier New" pitchFamily="34" charset="0"/>
-                <a:ea typeface="Courier New" pitchFamily="34" charset="-122"/>
-                <a:cs typeface="Courier New" pitchFamily="34" charset="-120"/>
-              </a:rPr>
-              <a:t>price = 1000</a:t>
-            </a:r>
-            <a:endParaRPr lang="en-US" sz="1400" dirty="0"/>
-          </a:p>
-          <a:p>
-            <a:pPr algn="l" indent="0" marL="0">
-              <a:lnSpc>
-                <a:spcPts val="1820"/>
-              </a:lnSpc>
-              <a:buNone/>
-            </a:pPr>
-            <a:r>
-              <a:rPr lang="en-US" sz="1400" dirty="0">
-                <a:solidFill>
-                  <a:srgbClr val="FFFFFF"/>
-                </a:solidFill>
-                <a:latin typeface="Courier New" pitchFamily="34" charset="0"/>
-                <a:ea typeface="Courier New" pitchFamily="34" charset="-122"/>
-                <a:cs typeface="Courier New" pitchFamily="34" charset="-120"/>
-              </a:rPr>
-              <a:t>large = units &gt;= 5</a:t>
-            </a:r>
-            <a:endParaRPr lang="en-US" sz="1400" dirty="0"/>
-          </a:p>
-          <a:p>
-            <a:pPr algn="l" indent="0" marL="0">
-              <a:lnSpc>
-                <a:spcPts val="1820"/>
-              </a:lnSpc>
-              <a:buNone/>
-            </a:pPr>
-            <a:r>
-              <a:rPr lang="en-US" sz="1400" dirty="0">
-                <a:solidFill>
-                  <a:srgbClr val="FFFFFF"/>
-                </a:solidFill>
-                <a:latin typeface="Courier New" pitchFamily="34" charset="0"/>
-                <a:ea typeface="Courier New" pitchFamily="34" charset="-122"/>
-                <a:cs typeface="Courier New" pitchFamily="34" charset="-120"/>
-              </a:rPr>
-              <a:t>expensive = price &gt;= 2000</a:t>
-            </a:r>
-            <a:endParaRPr lang="en-US" sz="1400" dirty="0"/>
-          </a:p>
-          <a:p>
-            <a:pPr algn="l" indent="0" marL="0">
-              <a:lnSpc>
-                <a:spcPts val="1820"/>
-              </a:lnSpc>
-              <a:buNone/>
-            </a:pPr>
-            <a:r>
-              <a:rPr lang="en-US" sz="1400" dirty="0">
-                <a:solidFill>
-                  <a:srgbClr val="FFFFFF"/>
-                </a:solidFill>
-                <a:latin typeface="Courier New" pitchFamily="34" charset="0"/>
-                <a:ea typeface="Courier New" pitchFamily="34" charset="-122"/>
-                <a:cs typeface="Courier New" pitchFamily="34" charset="-120"/>
-              </a:rPr>
-              <a:t>print(large </a:t>
-            </a:r>
-            <a:pPr algn="l" indent="0" marL="0">
-              <a:lnSpc>
-                <a:spcPts val="1820"/>
-              </a:lnSpc>
-              <a:buNone/>
-            </a:pPr>
-            <a:r>
-              <a:rPr lang="en-US" sz="1400" b="1" dirty="0">
-                <a:solidFill>
-                  <a:srgbClr val="FFFFFF"/>
-                </a:solidFill>
-                <a:latin typeface="Courier New" pitchFamily="34" charset="0"/>
-                <a:ea typeface="Courier New" pitchFamily="34" charset="-122"/>
-                <a:cs typeface="Courier New" pitchFamily="34" charset="-120"/>
-              </a:rPr>
-              <a:t>and</a:t>
-            </a:r>
-            <a:pPr algn="l" indent="0" marL="0">
-              <a:lnSpc>
-                <a:spcPts val="1820"/>
-              </a:lnSpc>
-              <a:buNone/>
-            </a:pPr>
-            <a:r>
-              <a:rPr lang="en-US" sz="1400" dirty="0">
-                <a:solidFill>
-                  <a:srgbClr val="FFFFFF"/>
-                </a:solidFill>
-                <a:latin typeface="Courier New" pitchFamily="34" charset="0"/>
-                <a:ea typeface="Courier New" pitchFamily="34" charset="-122"/>
-                <a:cs typeface="Courier New" pitchFamily="34" charset="-120"/>
-              </a:rPr>
-              <a:t> expensive)</a:t>
-            </a:r>
-            <a:endParaRPr lang="en-US" sz="1400" dirty="0"/>
-          </a:p>
-          <a:p>
-            <a:pPr algn="l" indent="0" marL="0">
-              <a:lnSpc>
-                <a:spcPts val="1820"/>
-              </a:lnSpc>
-              <a:buNone/>
-            </a:pPr>
-            <a:r>
-              <a:rPr lang="en-US" sz="1400" dirty="0">
-                <a:solidFill>
-                  <a:srgbClr val="FFFFFF"/>
-                </a:solidFill>
-                <a:latin typeface="Courier New" pitchFamily="34" charset="0"/>
-                <a:ea typeface="Courier New" pitchFamily="34" charset="-122"/>
-                <a:cs typeface="Courier New" pitchFamily="34" charset="-120"/>
-              </a:rPr>
-              <a:t>print(large </a:t>
-            </a:r>
-            <a:pPr algn="l" indent="0" marL="0">
-              <a:lnSpc>
-                <a:spcPts val="1820"/>
-              </a:lnSpc>
-              <a:buNone/>
-            </a:pPr>
-            <a:r>
-              <a:rPr lang="en-US" sz="1400" b="1" dirty="0">
-                <a:solidFill>
-                  <a:srgbClr val="FFFFFF"/>
-                </a:solidFill>
-                <a:latin typeface="Courier New" pitchFamily="34" charset="0"/>
-                <a:ea typeface="Courier New" pitchFamily="34" charset="-122"/>
-                <a:cs typeface="Courier New" pitchFamily="34" charset="-120"/>
-              </a:rPr>
-              <a:t>or</a:t>
-            </a:r>
-            <a:pPr algn="l" indent="0" marL="0">
-              <a:lnSpc>
-                <a:spcPts val="1820"/>
-              </a:lnSpc>
-              <a:buNone/>
-            </a:pPr>
-            <a:r>
-              <a:rPr lang="en-US" sz="1400" dirty="0">
-                <a:solidFill>
-                  <a:srgbClr val="FFFFFF"/>
-                </a:solidFill>
-                <a:latin typeface="Courier New" pitchFamily="34" charset="0"/>
-                <a:ea typeface="Courier New" pitchFamily="34" charset="-122"/>
-                <a:cs typeface="Courier New" pitchFamily="34" charset="-120"/>
-              </a:rPr>
-              <a:t> expensive)</a:t>
-            </a:r>
-            <a:endParaRPr lang="en-US" sz="1400" dirty="0"/>
-          </a:p>
-          <a:p>
-            <a:pPr algn="l" indent="0" marL="0">
-              <a:lnSpc>
-                <a:spcPts val="1820"/>
-              </a:lnSpc>
-              <a:buNone/>
-            </a:pPr>
-            <a:r>
-              <a:rPr lang="en-US" sz="1400" b="1" dirty="0">
-                <a:solidFill>
-                  <a:srgbClr val="FFFFFF"/>
-                </a:solidFill>
-                <a:latin typeface="Courier New" pitchFamily="34" charset="0"/>
-                <a:ea typeface="Courier New" pitchFamily="34" charset="-122"/>
-                <a:cs typeface="Courier New" pitchFamily="34" charset="-120"/>
-              </a:rPr>
-              <a:t>if</a:t>
-            </a:r>
-            <a:pPr algn="l" indent="0" marL="0">
-              <a:lnSpc>
-                <a:spcPts val="1820"/>
-              </a:lnSpc>
-              <a:buNone/>
-            </a:pPr>
-            <a:r>
-              <a:rPr lang="en-US" sz="1400" dirty="0">
-                <a:solidFill>
-                  <a:srgbClr val="FFFFFF"/>
-                </a:solidFill>
-                <a:latin typeface="Courier New" pitchFamily="34" charset="0"/>
-                <a:ea typeface="Courier New" pitchFamily="34" charset="-122"/>
-                <a:cs typeface="Courier New" pitchFamily="34" charset="-120"/>
-              </a:rPr>
-              <a:t> large </a:t>
-            </a:r>
-            <a:pPr algn="l" indent="0" marL="0">
-              <a:lnSpc>
-                <a:spcPts val="1820"/>
-              </a:lnSpc>
-              <a:buNone/>
-            </a:pPr>
-            <a:r>
-              <a:rPr lang="en-US" sz="1400" b="1" dirty="0">
-                <a:solidFill>
-                  <a:srgbClr val="FFFFFF"/>
-                </a:solidFill>
-                <a:latin typeface="Courier New" pitchFamily="34" charset="0"/>
-                <a:ea typeface="Courier New" pitchFamily="34" charset="-122"/>
-                <a:cs typeface="Courier New" pitchFamily="34" charset="-120"/>
-              </a:rPr>
-              <a:t>and</a:t>
-            </a:r>
-            <a:pPr algn="l" indent="0" marL="0">
-              <a:lnSpc>
-                <a:spcPts val="1820"/>
-              </a:lnSpc>
-              <a:buNone/>
-            </a:pPr>
-            <a:r>
-              <a:rPr lang="en-US" sz="1400" dirty="0">
-                <a:solidFill>
-                  <a:srgbClr val="FFFFFF"/>
-                </a:solidFill>
-                <a:latin typeface="Courier New" pitchFamily="34" charset="0"/>
-                <a:ea typeface="Courier New" pitchFamily="34" charset="-122"/>
-                <a:cs typeface="Courier New" pitchFamily="34" charset="-120"/>
-              </a:rPr>
-              <a:t> expensive:</a:t>
-            </a:r>
-            <a:endParaRPr lang="en-US" sz="1400" dirty="0"/>
-          </a:p>
-          <a:p>
-            <a:pPr algn="l" indent="0" marL="0">
-              <a:lnSpc>
-                <a:spcPts val="1820"/>
-              </a:lnSpc>
-              <a:buNone/>
-            </a:pPr>
-            <a:r>
-              <a:rPr lang="en-US" sz="1400" dirty="0">
-                <a:solidFill>
-                  <a:srgbClr val="FFFFFF"/>
-                </a:solidFill>
-                <a:latin typeface="Courier New" pitchFamily="34" charset="0"/>
-                <a:ea typeface="Courier New" pitchFamily="34" charset="-122"/>
-                <a:cs typeface="Courier New" pitchFamily="34" charset="-120"/>
-              </a:rPr>
-              <a:t>    print(</a:t>
-            </a:r>
-            <a:pPr algn="l" indent="0" marL="0">
-              <a:lnSpc>
-                <a:spcPts val="1820"/>
-              </a:lnSpc>
-              <a:buNone/>
-            </a:pPr>
-            <a:r>
-              <a:rPr lang="en-US" sz="1400" dirty="0">
-                <a:solidFill>
-                  <a:srgbClr val="E0BE36"/>
-                </a:solidFill>
-                <a:latin typeface="Courier New" pitchFamily="34" charset="0"/>
-                <a:ea typeface="Courier New" pitchFamily="34" charset="-122"/>
-                <a:cs typeface="Courier New" pitchFamily="34" charset="-120"/>
-              </a:rPr>
-              <a:t>"Large and expensive"</a:t>
-            </a:r>
-            <a:pPr algn="l" indent="0" marL="0">
-              <a:lnSpc>
-                <a:spcPts val="1820"/>
-              </a:lnSpc>
-              <a:buNone/>
-            </a:pPr>
-            <a:r>
-              <a:rPr lang="en-US" sz="1400" dirty="0">
-                <a:solidFill>
-                  <a:srgbClr val="FFFFFF"/>
-                </a:solidFill>
-                <a:latin typeface="Courier New" pitchFamily="34" charset="0"/>
-                <a:ea typeface="Courier New" pitchFamily="34" charset="-122"/>
-                <a:cs typeface="Courier New" pitchFamily="34" charset="-120"/>
-              </a:rPr>
-              <a:t>)</a:t>
-            </a:r>
-            <a:endParaRPr lang="en-US" sz="1400" dirty="0"/>
-          </a:p>
-          <a:p>
-            <a:pPr algn="l" indent="0" marL="0">
-              <a:lnSpc>
-                <a:spcPts val="1820"/>
-              </a:lnSpc>
-              <a:buNone/>
-            </a:pPr>
-            <a:r>
-              <a:rPr lang="en-US" sz="1400" b="1" dirty="0">
-                <a:solidFill>
-                  <a:srgbClr val="FFFFFF"/>
-                </a:solidFill>
-                <a:latin typeface="Courier New" pitchFamily="34" charset="0"/>
-                <a:ea typeface="Courier New" pitchFamily="34" charset="-122"/>
-                <a:cs typeface="Courier New" pitchFamily="34" charset="-120"/>
-              </a:rPr>
-              <a:t>elif</a:t>
-            </a:r>
-            <a:pPr algn="l" indent="0" marL="0">
-              <a:lnSpc>
-                <a:spcPts val="1820"/>
-              </a:lnSpc>
-              <a:buNone/>
-            </a:pPr>
-            <a:r>
-              <a:rPr lang="en-US" sz="1400" dirty="0">
-                <a:solidFill>
-                  <a:srgbClr val="FFFFFF"/>
-                </a:solidFill>
-                <a:latin typeface="Courier New" pitchFamily="34" charset="0"/>
-                <a:ea typeface="Courier New" pitchFamily="34" charset="-122"/>
-                <a:cs typeface="Courier New" pitchFamily="34" charset="-120"/>
-              </a:rPr>
-              <a:t> large:</a:t>
-            </a:r>
-            <a:endParaRPr lang="en-US" sz="1400" dirty="0"/>
-          </a:p>
-          <a:p>
-            <a:pPr algn="l" indent="0" marL="0">
-              <a:lnSpc>
-                <a:spcPts val="1820"/>
-              </a:lnSpc>
-              <a:buNone/>
-            </a:pPr>
-            <a:r>
-              <a:rPr lang="en-US" sz="1400" dirty="0">
-                <a:solidFill>
-                  <a:srgbClr val="FFFFFF"/>
-                </a:solidFill>
-                <a:latin typeface="Courier New" pitchFamily="34" charset="0"/>
-                <a:ea typeface="Courier New" pitchFamily="34" charset="-122"/>
-                <a:cs typeface="Courier New" pitchFamily="34" charset="-120"/>
-              </a:rPr>
-              <a:t>    print(</a:t>
-            </a:r>
-            <a:pPr algn="l" indent="0" marL="0">
-              <a:lnSpc>
-                <a:spcPts val="1820"/>
-              </a:lnSpc>
-              <a:buNone/>
-            </a:pPr>
-            <a:r>
-              <a:rPr lang="en-US" sz="1400" dirty="0">
-                <a:solidFill>
-                  <a:srgbClr val="E0BE36"/>
-                </a:solidFill>
-                <a:latin typeface="Courier New" pitchFamily="34" charset="0"/>
-                <a:ea typeface="Courier New" pitchFamily="34" charset="-122"/>
-                <a:cs typeface="Courier New" pitchFamily="34" charset="-120"/>
-              </a:rPr>
-              <a:t>"Large only"</a:t>
-            </a:r>
-            <a:pPr algn="l" indent="0" marL="0">
-              <a:lnSpc>
-                <a:spcPts val="1820"/>
-              </a:lnSpc>
-              <a:buNone/>
-            </a:pPr>
-            <a:r>
-              <a:rPr lang="en-US" sz="1400" dirty="0">
-                <a:solidFill>
-                  <a:srgbClr val="FFFFFF"/>
-                </a:solidFill>
-                <a:latin typeface="Courier New" pitchFamily="34" charset="0"/>
-                <a:ea typeface="Courier New" pitchFamily="34" charset="-122"/>
-                <a:cs typeface="Courier New" pitchFamily="34" charset="-120"/>
-              </a:rPr>
-              <a:t>)</a:t>
-            </a:r>
-            <a:endParaRPr lang="en-US" sz="1400" dirty="0"/>
-          </a:p>
-          <a:p>
-            <a:pPr algn="l" indent="0" marL="0">
-              <a:lnSpc>
-                <a:spcPts val="1820"/>
-              </a:lnSpc>
-              <a:buNone/>
-            </a:pPr>
-            <a:r>
-              <a:rPr lang="en-US" sz="1400" b="1" dirty="0">
-                <a:solidFill>
-                  <a:srgbClr val="FFFFFF"/>
-                </a:solidFill>
-                <a:latin typeface="Courier New" pitchFamily="34" charset="0"/>
-                <a:ea typeface="Courier New" pitchFamily="34" charset="-122"/>
-                <a:cs typeface="Courier New" pitchFamily="34" charset="-120"/>
-              </a:rPr>
-              <a:t>else</a:t>
-            </a:r>
-            <a:pPr algn="l" indent="0" marL="0">
-              <a:lnSpc>
-                <a:spcPts val="1820"/>
-              </a:lnSpc>
-              <a:buNone/>
-            </a:pPr>
-            <a:r>
-              <a:rPr lang="en-US" sz="1400" dirty="0">
-                <a:solidFill>
-                  <a:srgbClr val="FFFFFF"/>
-                </a:solidFill>
-                <a:latin typeface="Courier New" pitchFamily="34" charset="0"/>
-                <a:ea typeface="Courier New" pitchFamily="34" charset="-122"/>
-                <a:cs typeface="Courier New" pitchFamily="34" charset="-120"/>
-              </a:rPr>
-              <a:t>:</a:t>
-            </a:r>
-            <a:endParaRPr lang="en-US" sz="1400" dirty="0"/>
-          </a:p>
-          <a:p>
-            <a:pPr algn="l" indent="0" marL="0">
-              <a:lnSpc>
-                <a:spcPts val="1820"/>
-              </a:lnSpc>
-              <a:buNone/>
-            </a:pPr>
-            <a:r>
-              <a:rPr lang="en-US" sz="1400" dirty="0">
-                <a:solidFill>
-                  <a:srgbClr val="FFFFFF"/>
-                </a:solidFill>
-                <a:latin typeface="Courier New" pitchFamily="34" charset="0"/>
-                <a:ea typeface="Courier New" pitchFamily="34" charset="-122"/>
-                <a:cs typeface="Courier New" pitchFamily="34" charset="-120"/>
-              </a:rPr>
-              <a:t>    print(</a:t>
-            </a:r>
-            <a:pPr algn="l" indent="0" marL="0">
-              <a:lnSpc>
-                <a:spcPts val="1820"/>
-              </a:lnSpc>
-              <a:buNone/>
-            </a:pPr>
-            <a:r>
-              <a:rPr lang="en-US" sz="1400" dirty="0">
-                <a:solidFill>
-                  <a:srgbClr val="E0BE36"/>
-                </a:solidFill>
-                <a:latin typeface="Courier New" pitchFamily="34" charset="0"/>
-                <a:ea typeface="Courier New" pitchFamily="34" charset="-122"/>
-                <a:cs typeface="Courier New" pitchFamily="34" charset="-120"/>
-              </a:rPr>
-              <a:t>"Small"</a:t>
-            </a:r>
-            <a:pPr algn="l" indent="0" marL="0">
-              <a:lnSpc>
-                <a:spcPts val="1820"/>
-              </a:lnSpc>
-              <a:buNone/>
-            </a:pPr>
-            <a:r>
-              <a:rPr lang="en-US" sz="1400" dirty="0">
-                <a:solidFill>
-                  <a:srgbClr val="FFFFFF"/>
-                </a:solidFill>
-                <a:latin typeface="Courier New" pitchFamily="34" charset="0"/>
-                <a:ea typeface="Courier New" pitchFamily="34" charset="-122"/>
-                <a:cs typeface="Courier New" pitchFamily="34" charset="-120"/>
-              </a:rPr>
-              <a:t>)</a:t>
-            </a:r>
-            <a:endParaRPr lang="en-US" sz="1400" dirty="0"/>
-          </a:p>
-        </p:txBody>
-      </p:sp>
+        </p:nvPicPr>
+        <p:blipFill>
+          <a:blip r:embed="rId1"/>
+          <a:stretch>
+            <a:fillRect/>
+          </a:stretch>
+        </p:blipFill>
+        <p:spPr>
+          <a:xfrm>
+            <a:off x="9418320" y="2103120"/>
+            <a:ext cx="1828800" cy="1828800"/>
+          </a:xfrm>
+          <a:prstGeom prst="rect">
+            <a:avLst/>
+          </a:prstGeom>
+        </p:spPr>
+      </p:pic>
       <p:sp>
         <p:nvSpPr>
           <p:cNvPr id="25" name="Slide Number Placeholder 0"/>
@@ -7294,15 +6779,15 @@
           <a:p>
             <a:pPr algn="l" indent="0" marL="0">
               <a:lnSpc>
-                <a:spcPts val="3600"/>
+                <a:spcPts val="3360"/>
               </a:lnSpc>
               <a:spcAft>
-                <a:spcPts val="2520"/>
+                <a:spcPts val="2020"/>
               </a:spcAft>
               <a:buNone/>
             </a:pPr>
             <a:r>
-              <a:rPr lang="en-US" sz="3000" dirty="0">
+              <a:rPr lang="en-US" sz="2800" dirty="0">
                 <a:solidFill>
                   <a:srgbClr val="111111"/>
                 </a:solidFill>
@@ -7310,22 +6795,22 @@
                 <a:ea typeface="Lato" pitchFamily="34" charset="-122"/>
                 <a:cs typeface="Lato" pitchFamily="34" charset="-120"/>
               </a:rPr>
-              <a:t>Write a decision for a ticket that costs 5000. Print "Buy" if the budget is at least 5000 and otherwise print "Save". Test 4999, 5000 and 5001.</a:t>
-            </a:r>
-            <a:endParaRPr lang="en-US" sz="3000" dirty="0"/>
-          </a:p>
-          <a:p>
-            <a:pPr algn="l" indent="0" marL="0">
-              <a:lnSpc>
-                <a:spcPts val="3600"/>
+              <a:t>Write a decision for a ticket that costs 5000.</a:t>
+            </a:r>
+            <a:endParaRPr lang="en-US" sz="2800" dirty="0"/>
+          </a:p>
+          <a:p>
+            <a:pPr algn="l" indent="0" marL="0">
+              <a:lnSpc>
+                <a:spcPts val="3360"/>
               </a:lnSpc>
               <a:spcAft>
-                <a:spcPts val="2520"/>
+                <a:spcPts val="2020"/>
               </a:spcAft>
               <a:buNone/>
             </a:pPr>
             <a:r>
-              <a:rPr lang="en-US" sz="3000" dirty="0">
+              <a:rPr lang="en-US" sz="2800" dirty="0">
                 <a:solidFill>
                   <a:srgbClr val="111111"/>
                 </a:solidFill>
@@ -7333,9 +6818,55 @@
                 <a:ea typeface="Lato" pitchFamily="34" charset="-122"/>
                 <a:cs typeface="Lato" pitchFamily="34" charset="-120"/>
               </a:rPr>
-              <a:t>Save it as DA04. Write two sentences: what you changed and how you checked it.</a:t>
-            </a:r>
-            <a:endParaRPr lang="en-US" sz="3000" dirty="0"/>
+              <a:t>Print "Buy" if the budget is at least 5000 and otherwise print "Save".</a:t>
+            </a:r>
+            <a:endParaRPr lang="en-US" sz="2800" dirty="0"/>
+          </a:p>
+          <a:p>
+            <a:pPr algn="l" indent="0" marL="0">
+              <a:lnSpc>
+                <a:spcPts val="3360"/>
+              </a:lnSpc>
+              <a:spcAft>
+                <a:spcPts val="2020"/>
+              </a:spcAft>
+              <a:buNone/>
+            </a:pPr>
+            <a:r>
+              <a:rPr lang="en-US" sz="2800" dirty="0">
+                <a:solidFill>
+                  <a:srgbClr val="111111"/>
+                </a:solidFill>
+                <a:latin typeface="Lato" pitchFamily="34" charset="0"/>
+                <a:ea typeface="Lato" pitchFamily="34" charset="-122"/>
+                <a:cs typeface="Lato" pitchFamily="34" charset="-120"/>
+              </a:rPr>
+              <a:t>Test 4999, 5000 and 5001.</a:t>
+            </a:r>
+            <a:endParaRPr lang="en-US" sz="2800" dirty="0"/>
+          </a:p>
+          <a:p>
+            <a:pPr algn="l" indent="0" marL="0">
+              <a:lnSpc>
+                <a:spcPts val="3360"/>
+              </a:lnSpc>
+              <a:spcAft>
+                <a:spcPts val="2020"/>
+              </a:spcAft>
+              <a:buNone/>
+            </a:pPr>
+            <a:r>
+              <a:rPr lang="en-US" sz="2800" dirty="0">
+                <a:solidFill>
+                  <a:srgbClr val="111111"/>
+                </a:solidFill>
+                <a:latin typeface="Lato" pitchFamily="34" charset="0"/>
+                <a:ea typeface="Lato" pitchFamily="34" charset="-122"/>
+                <a:cs typeface="Lato" pitchFamily="34" charset="-120"/>
+              </a:rPr>
+              <a:t>Write two sentences: what you changed and how you checked it.</a:t>
+            </a:r>
+            <a:endParaRPr lang="en-US" sz="2800" dirty="0"/>
           </a:p>
         </p:txBody>
       </p:sp>
